--- a/docs/links-26/presentations/Second-Nature-for-colleagues.pptx
+++ b/docs/links-26/presentations/Second-Nature-for-colleagues.pptx
@@ -1308,7 +1308,7 @@
           <a:p>
             <a:r>
               <a:rPr lang="en-US" dirty="0"/>
-              <a:t>Monday to Saturday, counting a cover week as four days worked, the same way the clerks do. Sundays are overtime by agreement, so they are not in these figures — today or in Second Nature. Exactly, Second Nature works out at 218.6 days a year: just under today’s 219, which is also the most the 26-week link is allowed (agreed 1 October 2026). The average shift is two minutes longer, which is on slide 6.</a:t>
+              <a:t>Monday to Saturday, counting a cover week as four days worked, the same way the clerks do. Sundays are overtime by agreement, so they are not in these figures — today or in Second Nature. Exactly, Second Nature works out at 218.6 days a year: just under today’s 219, which is also the most the 26-week link is allowed (agreed 1 October 2026). The average shift is about two minutes longer, which is on slide 6.</a:t>
             </a:r>
             <a:endParaRPr lang="en-US" dirty="0"/>
           </a:p>
@@ -1748,7 +1748,7 @@
           <a:p>
             <a:r>
               <a:rPr lang="en-US" dirty="0"/>
-              <a:t>A full weekend is Saturday and the following Sunday both off. Today that is 4 weekends in a 20-week cycle; Second Nature gives 7 in 26. They fall unevenly, not every fourth week, and can be up to ten weeks apart, against seven today — worth saying, because somebody will start on the long gap. Most weeks now keep the same shift time Monday to Friday — 15 of the 21 working weeks — and all earlies or all lates, so you are not bouncing between earlies and lates inside a week. Rest days mostly come in pairs — 21 of the 25 rest-day breaks are two days or more, against 13 of 17 today — and there are no six-day weeks (today there is one).</a:t>
+              <a:t>A full weekend is Saturday and the following Sunday both off. Today that is 4 weekends in a 20-week cycle; Second Nature gives 7 in 26. They fall unevenly, not every fourth week, and can be up to ten weeks apart, against seven today — worth saying, because somebody will start on the long gap. Most weeks now keep the same shift time Monday to Friday — 15 of the 21 working weeks — and all but two are all earlies or all lates, where today seven weeks in 16 mix the two. Rest days mostly come in pairs — 21 of the 25 rest-day breaks are two days or more, against 13 of 17 today — and there are no six-day weeks (today there is one).</a:t>
             </a:r>
             <a:endParaRPr lang="en-US" dirty="0"/>
           </a:p>
@@ -4977,7 +4977,7 @@
                 <a:ea typeface="Inter" pitchFamily="34" charset="-122"/>
                 <a:cs typeface="Inter" pitchFamily="34" charset="-120"/>
               </a:rPr>
-              <a:t>Shifts 2 minutes longer on average</a:t>
+              <a:t>Shifts about 2 minutes longer on average</a:t>
             </a:r>
             <a:endParaRPr lang="en-US" sz="1400" dirty="0"/>
           </a:p>
@@ -11424,7 +11424,7 @@
                 <a:ea typeface="Inter" pitchFamily="34" charset="-122"/>
                 <a:cs typeface="Inter" pitchFamily="34" charset="-120"/>
               </a:rPr>
-              <a:t>Every closing shift gets shorter — the average goes up two minutes</a:t>
+              <a:t>Every closing shift gets shorter — the average goes up about two minutes</a:t>
             </a:r>
             <a:endParaRPr lang="en-US" sz="1500" dirty="0"/>
           </a:p>
